--- a/docs/presentation/Final_Presentation.pptx
+++ b/docs/presentation/Final_Presentation.pptx
@@ -456,7 +456,7 @@
           <a:lstStyle xmlns:a="http://schemas.openxmlformats.org/drawingml/2006/main"/>
           <a:p xmlns:a="http://schemas.openxmlformats.org/drawingml/2006/main">
             <a:r>
-              <a:t>25 seconds. Introduce the QA Agent as the capstone product and BudgetMe as the target application. The central value is traceability and developer control.</a:t>
+              <a:t>25 seconds. We built the Software Engineering QA Agent as our capstone product and used BudgetMe as the target application. We focused on traceability and developer control throughout the workflow.</a:t>
             </a:r>
           </a:p>
         </p:txBody>
@@ -526,7 +526,7 @@
           <a:lstStyle xmlns:a="http://schemas.openxmlformats.org/drawingml/2006/main"/>
           <a:p xmlns:a="http://schemas.openxmlformats.org/drawingml/2006/main">
             <a:r>
-              <a:t>55 seconds. Open the selected recovery trace: tool_error, grounded retrieval, draft_saved. The retrieval fault was deliberately injected. Also point to normal and adversarial traces. Stop limits and guards remain deterministic.</a:t>
+              <a:t>55 seconds. We deliberately injected one retrieval failure, then recorded grounded retrieval and a saved draft in the selected recovery trace. We also kept normal and adversarial traces. We enforced stop limits and tool guards in deterministic code.</a:t>
             </a:r>
           </a:p>
         </p:txBody>
@@ -596,7 +596,7 @@
           <a:lstStyle xmlns:a="http://schemas.openxmlformats.org/drawingml/2006/main"/>
           <a:p xmlns:a="http://schemas.openxmlformats.org/drawingml/2006/main">
             <a:r>
-              <a:t>50 seconds. Two opt-in memory runs completed. Show prior_report_count=1 in the second trace and the subsequent fresh retrieval. Explain that project failure analysis saves summaries while reuse remains off there; the standalone path supports explicit reuse.</a:t>
+              <a:t>50 seconds. We completed two opt-in memory runs. The second trace records prior_report_count=1 and fresh retrieval. Our project failure-analysis path saves summaries with reuse off, while standalone triage supports explicit reuse.</a:t>
             </a:r>
           </a:p>
         </p:txBody>
@@ -666,7 +666,7 @@
           <a:lstStyle xmlns:a="http://schemas.openxmlformats.org/drawingml/2006/main"/>
           <a:p xmlns:a="http://schemas.openxmlformats.org/drawingml/2006/main">
             <a:r>
-              <a:t>45 seconds. Distinguish offline checks of deterministic behavior from live model evidence. The failure catalogue records request-size errors, retrieval scope problems, truncation, provider errors and generated-test setup failures with responses and retests.</a:t>
+              <a:t>45 seconds. We kept offline checks of deterministic behaviour separate from live model evidence. We recorded request-size errors, retrieval-scope problems, unfinished responses, provider errors and generated-test setup failures in the failure catalogue, with our responses and subsequent checks.</a:t>
             </a:r>
           </a:p>
         </p:txBody>
@@ -736,7 +736,7 @@
           <a:lstStyle xmlns:a="http://schemas.openxmlformats.org/drawingml/2006/main"/>
           <a:p xmlns:a="http://schemas.openxmlformats.org/drawingml/2006/main">
             <a:r>
-              <a:t>35 seconds. The 36 scenarios have been executed. After explicitly recorded retests, 31 satisfy every criterion and five are partial. Partial cases concern feature completeness, proposal/result attribution, conflict clarification, setup diagnosis and stop/handoff behavior. Full-pass rate is 86.1 percent; partial cases are excluded. Generative checks use live Groq; deterministic cases use actual services and identified fault injection. Evidence: docs/evaluation/Final_Evaluation_Results.csv and evidence/final/scenario_assessment.json. No independent human acceptance review is claimed.</a:t>
+              <a:t>35 seconds. We executed all 36 scenarios for the 22 October evaluation. We recorded 31 full passes and five partial results after the documented checks, giving an 86.1 percent full-pass rate with partials excluded. We found gaps in feature completeness, proposal/result attribution, conflict clarification, setup diagnosis and stop/handoff behaviour. We used live Groq for generative cases and actual services with labelled fault injection for deterministic cases.</a:t>
             </a:r>
           </a:p>
         </p:txBody>
@@ -806,7 +806,7 @@
           <a:lstStyle xmlns:a="http://schemas.openxmlformats.org/drawingml/2006/main"/>
           <a:p xmlns:a="http://schemas.openxmlformats.org/drawingml/2006/main">
             <a:r>
-              <a:t>Allow four minutes. Use the prepared disposable demonstration session. Ask a BudgetMe knowledge question, show sources, inspect a benign case and its code, approve/run explicitly, then inspect recorded results and the controlled recovery trace. If a service fails during the demonstration, explain the actual failure and use the retained trace as evidence.</a:t>
+              <a:t>Allow four minutes. We will use the prepared disposable demonstration session to follow one case from source to evidence. We will ask a BudgetMe knowledge question, inspect its sources and a benign proposed case, review its code, approve it and explicitly run it. We will then inspect the recorded results and recovery trace. If a service fails, we will report the actual failure and use the retained trace as evidence.</a:t>
             </a:r>
           </a:p>
         </p:txBody>
@@ -876,7 +876,7 @@
           <a:lstStyle xmlns:a="http://schemas.openxmlformats.org/drawingml/2006/main"/>
           <a:p xmlns:a="http://schemas.openxmlformats.org/drawingml/2006/main">
             <a:r>
-              <a:t>25 seconds. Close with the engineering value: readable evidence, explicit boundaries and meaningful human control. Invite questions about the sources, limits or traces.</a:t>
+              <a:t>25 seconds. We kept readable evidence, explicit boundaries and developer control at the centre of our project. We leave the final decision with the developer and can discuss the sources, limits and traces behind our results.</a:t>
             </a:r>
           </a:p>
         </p:txBody>
@@ -946,7 +946,7 @@
           <a:lstStyle xmlns:a="http://schemas.openxmlformats.org/drawingml/2006/main"/>
           <a:p xmlns:a="http://schemas.openxmlformats.org/drawingml/2006/main">
             <a:r>
-              <a:t>35 seconds. Explain the developer workflow problem. Use the charter and user stories as the product requirements, and keep them distinct from BudgetMe requirements.</a:t>
+              <a:t>35 seconds. We addressed the gap between requirements and practical testing. We used the charter and user stories to define our QA Agent, while keeping BudgetMe requirements separate as the target behaviour to check.</a:t>
             </a:r>
           </a:p>
         </p:txBody>
@@ -1016,7 +1016,7 @@
           <a:lstStyle xmlns:a="http://schemas.openxmlformats.org/drawingml/2006/main"/>
           <a:p xmlns:a="http://schemas.openxmlformats.org/drawingml/2006/main">
             <a:r>
-              <a:t>45 seconds. Walk through the connected project, requirement records and review gates. Emphasize that explicit approval and Run are separate actions.</a:t>
+              <a:t>45 seconds. We connected the project, stored requirements and added review gates. Our workflow requires explicit approval and a separate Run action before any selected test executes.</a:t>
             </a:r>
           </a:p>
         </p:txBody>
@@ -1086,7 +1086,7 @@
           <a:lstStyle xmlns:a="http://schemas.openxmlformats.org/drawingml/2006/main"/>
           <a:p xmlns:a="http://schemas.openxmlformats.org/drawingml/2006/main">
             <a:r>
-              <a:t>50 seconds. Explain local records, the Groq boundary, explicit tool dispatch and the separate approved Docker execution path. Source SVG remains supplied.</a:t>
+              <a:t>50 seconds. We kept local records and deterministic tool dispatch on our side of the Groq boundary. We used a separate approved Docker execution path. The supplied SVG shows these boundaries.</a:t>
             </a:r>
           </a:p>
         </p:txBody>
@@ -1156,7 +1156,7 @@
           <a:lstStyle xmlns:a="http://schemas.openxmlformats.org/drawingml/2006/main"/>
           <a:p xmlns:a="http://schemas.openxmlformats.org/drawingml/2006/main">
             <a:r>
-              <a:t>35 seconds. This is the early model baseline. Read the versioned prompt comparison rather than treating it as a later workflow score. Exact counts come from the saved ten-case evaluation.</a:t>
+              <a:t>35 seconds. We used this early model baseline to compare the versioned prompts against the same ten requirements. The displayed counts come from the saved prompt evaluation and describe that configuration, rather than a later workflow score.</a:t>
             </a:r>
           </a:p>
         </p:txBody>
@@ -1226,7 +1226,7 @@
           <a:lstStyle xmlns:a="http://schemas.openxmlformats.org/drawingml/2006/main"/>
           <a:p xmlns:a="http://schemas.openxmlformats.org/drawingml/2006/main">
             <a:r>
-              <a:t>45 seconds. Describe the current target snapshot and its provenance. The movement implementation records local transactions; do not imply a production payment transaction was made.</a:t>
+              <a:t>45 seconds. We recorded the target snapshot and its provenance before using it. We verified 100 supported source files. BudgetMe records movements locally; we did not verify a production payment transaction.</a:t>
             </a:r>
           </a:p>
         </p:txBody>
@@ -1296,7 +1296,7 @@
           <a:lstStyle xmlns:a="http://schemas.openxmlformats.org/drawingml/2006/main"/>
           <a:p xmlns:a="http://schemas.openxmlformats.org/drawingml/2006/main">
             <a:r>
-              <a:t>35 seconds. Use FR-006 as an example of a source-derived rule that can drive boundary tests. The cap is the entered pay-period income, not a monthly normalization. Explain normal/equality/over-limit inputs.</a:t>
+              <a:t>35 seconds. We used FR-006 to connect a source-derived rule to normal, equality and over-limit test inputs. We checked the cap against the entered pay-period income; it does not normalise that amount to monthly income.</a:t>
             </a:r>
           </a:p>
         </p:txBody>
@@ -1366,7 +1366,7 @@
           <a:lstStyle xmlns:a="http://schemas.openxmlformats.org/drawingml/2006/main"/>
           <a:p xmlns:a="http://schemas.openxmlformats.org/drawingml/2006/main">
             <a:r>
-              <a:t>50 seconds. Show one retained answer and its excerpts. R13 gives the source-supported minimum amount and leaves the production provider URL unresolved. R14/R15 do not invent absent information. The recorded result is a single retest under its stated rubric.</a:t>
+              <a:t>50 seconds. We kept each answer with the excerpts used to support it. In the 22 October evaluation, R13 reports the supported minimum amount and leaves the production provider URL unresolved; R14 and R15 do not invent absent information. We used an AI-assisted rubric for this single evaluation, with independent human acceptance still pending.</a:t>
             </a:r>
           </a:p>
         </p:txBody>
@@ -1436,7 +1436,7 @@
           <a:lstStyle xmlns:a="http://schemas.openxmlformats.org/drawingml/2006/main"/>
           <a:p xmlns:a="http://schemas.openxmlformats.org/drawingml/2006/main">
             <a:r>
-              <a:t>45 seconds. Both live model-selected tool demonstrations worked. The prohibited-action request selected no tool. Discuss the schema/allow-list enforcement independently from the model wording.</a:t>
+              <a:t>45 seconds. We recorded successful live model selection for retrieval and local draft creation. Our prohibited-action request selected no tool. We enforced the schema and allow-list in application code independently of the wording returned by the model.</a:t>
             </a:r>
           </a:p>
         </p:txBody>
